--- a/weekly-tactics/01-market-research/NBC_Market_Research_Tactic.pptx
+++ b/weekly-tactics/01-market-research/NBC_Market_Research_Tactic.pptx
@@ -3071,7 +3071,7 @@
         </p:blipFill>
         <p:spPr>
           <a:xfrm>
-            <a:off x="5310187" y="3114973"/>
+            <a:off x="6724650" y="3120033"/>
             <a:ext cx="923925" cy="133350"/>
           </a:xfrm>
           <a:prstGeom prst="rect">
@@ -3876,7 +3876,7 @@
         </p:blipFill>
         <p:spPr>
           <a:xfrm>
-            <a:off x="4100513" y="3244900"/>
+            <a:off x="6062663" y="3244900"/>
             <a:ext cx="752475" cy="133350"/>
           </a:xfrm>
           <a:prstGeom prst="rect">
@@ -3902,7 +3902,7 @@
         </p:blipFill>
         <p:spPr>
           <a:xfrm>
-            <a:off x="4929188" y="3244900"/>
+            <a:off x="6891338" y="3244900"/>
             <a:ext cx="923925" cy="133350"/>
           </a:xfrm>
           <a:prstGeom prst="rect">
